--- a/examples/sample_template.pptx
+++ b/examples/sample_template.pptx
@@ -107,6 +107,14 @@
 <file path=ppt/slideLayouts/slideLayout1.xml><?xml version="1.0" encoding="utf-8"?>
 <p:sldLayout xmlns:a="http://schemas.openxmlformats.org/drawingml/2006/main" xmlns:r="http://schemas.openxmlformats.org/officeDocument/2006/relationships" xmlns:p="http://schemas.openxmlformats.org/presentationml/2006/main" type="title" preserve="1">
   <p:cSld name="Title Slide">
+    <p:bg>
+      <p:bgPr>
+        <a:solidFill>
+          <a:srgbClr val="2D3D43"/>
+        </a:solidFill>
+        <a:effectLst/>
+      </p:bgPr>
+    </p:bg>
     <p:spTree>
       <p:nvGrpSpPr>
         <p:cNvPr id="1" name=""/>
@@ -139,7 +147,15 @@
         </p:spPr>
         <p:txBody>
           <a:bodyPr/>
-          <a:lstStyle/>
+          <a:lstStyle>
+            <a:lvl1pPr>
+              <a:defRPr>
+                <a:solidFill>
+                  <a:srgbClr val="F4EFE6"/>
+                </a:solidFill>
+              </a:defRPr>
+            </a:lvl1pPr>
+          </a:lstStyle>
           <a:p>
             <a:r>
               <a:rPr lang="en-US" smtClean="0"/>
@@ -172,9 +188,7 @@
               <a:buNone/>
               <a:defRPr>
                 <a:solidFill>
-                  <a:schemeClr val="tx1">
-                    <a:tint val="75000"/>
-                  </a:schemeClr>
+                  <a:srgbClr val="8FA395"/>
                 </a:solidFill>
               </a:defRPr>
             </a:lvl1pPr>
@@ -182,9 +196,7 @@
               <a:buNone/>
               <a:defRPr>
                 <a:solidFill>
-                  <a:schemeClr val="tx1">
-                    <a:tint val="75000"/>
-                  </a:schemeClr>
+                  <a:srgbClr val="8FA395"/>
                 </a:solidFill>
               </a:defRPr>
             </a:lvl2pPr>
@@ -699,6 +711,14 @@
 <file path=ppt/slideLayouts/slideLayout2.xml><?xml version="1.0" encoding="utf-8"?>
 <p:sldLayout xmlns:a="http://schemas.openxmlformats.org/drawingml/2006/main" xmlns:r="http://schemas.openxmlformats.org/officeDocument/2006/relationships" xmlns:p="http://schemas.openxmlformats.org/presentationml/2006/main" type="obj" preserve="1">
   <p:cSld name="Title and Content">
+    <p:bg>
+      <p:bgPr>
+        <a:solidFill>
+          <a:srgbClr val="F4EFE6"/>
+        </a:solidFill>
+        <a:effectLst/>
+      </p:bgPr>
+    </p:bg>
     <p:spTree>
       <p:nvGrpSpPr>
         <p:cNvPr id="1" name=""/>
@@ -726,7 +746,15 @@
         <p:spPr/>
         <p:txBody>
           <a:bodyPr/>
-          <a:lstStyle/>
+          <a:lstStyle>
+            <a:lvl1pPr>
+              <a:defRPr>
+                <a:solidFill>
+                  <a:srgbClr val="2D3D43"/>
+                </a:solidFill>
+              </a:defRPr>
+            </a:lvl1pPr>
+          </a:lstStyle>
           <a:p>
             <a:r>
               <a:rPr lang="en-US" smtClean="0"/>
@@ -749,7 +777,15 @@
         <p:spPr/>
         <p:txBody>
           <a:bodyPr/>
-          <a:lstStyle/>
+          <a:lstStyle>
+            <a:lvl1pPr>
+              <a:defRPr>
+                <a:solidFill>
+                  <a:srgbClr val="2D3D43"/>
+                </a:solidFill>
+              </a:defRPr>
+            </a:lvl1pPr>
+          </a:lstStyle>
           <a:p>
             <a:pPr lvl="0"/>
             <a:r>
